--- a/docs/free-rwe-resources/train-the-trainer/training/day-05-treatment-pathways/kit/Participant-Handout.pptx
+++ b/docs/free-rwe-resources/train-the-trainer/training/day-05-treatment-pathways/kit/Participant-Handout.pptx
@@ -11,7 +11,7 @@
     <p:sldId id="259" r:id="rId10"/>
     <p:sldId id="260" r:id="rId11"/>
   </p:sldIdLst>
-  <p:sldSz cx="9144000" cy="6858000" type="screen4x3"/>
+  <p:sldSz cx="12192000" cy="6858000" type="screen4x3"/>
   <p:notesSz cx="6858000" cy="9144000"/>
   <p:defaultTextStyle>
     <a:defPPr>
@@ -140,8 +140,8 @@
         </p:nvSpPr>
         <p:spPr>
           <a:xfrm>
-            <a:off x="685800" y="2130425"/>
-            <a:ext cx="7772400" cy="1470025"/>
+            <a:off x="914400" y="2130425"/>
+            <a:ext cx="10363200" cy="1470025"/>
           </a:xfrm>
         </p:spPr>
         <p:txBody>
@@ -168,14 +168,14 @@
         </p:nvSpPr>
         <p:spPr>
           <a:xfrm>
-            <a:off x="1371600" y="3886200"/>
-            <a:ext cx="6400800" cy="1752600"/>
+            <a:off x="1828800" y="3886200"/>
+            <a:ext cx="8534400" cy="1752600"/>
           </a:xfrm>
         </p:spPr>
         <p:txBody>
           <a:bodyPr/>
           <a:lstStyle>
-            <a:lvl1pPr marL="0" indent="0" algn="ctr">
+            <a:lvl1pPr marL="0" indent="0" algn="l">
               <a:buNone/>
               <a:defRPr>
                 <a:solidFill>
@@ -552,8 +552,8 @@
         </p:nvSpPr>
         <p:spPr>
           <a:xfrm>
-            <a:off x="6629400" y="274638"/>
-            <a:ext cx="2057400" cy="5851525"/>
+            <a:off x="8839200" y="274638"/>
+            <a:ext cx="2743200" cy="5851525"/>
           </a:xfrm>
         </p:spPr>
         <p:txBody>
@@ -580,8 +580,8 @@
         </p:nvSpPr>
         <p:spPr>
           <a:xfrm>
-            <a:off x="457200" y="274638"/>
-            <a:ext cx="6019800" cy="5851525"/>
+            <a:off x="609600" y="274638"/>
+            <a:ext cx="8026400" cy="5851525"/>
           </a:xfrm>
         </p:spPr>
         <p:txBody>
@@ -902,46 +902,46 @@
         </p:nvSpPr>
         <p:spPr>
           <a:xfrm>
-            <a:off x="722313" y="4406900"/>
-            <a:ext cx="7772400" cy="1362075"/>
+            <a:off x="963084" y="1920240"/>
+            <a:ext cx="10363200" cy="1280160"/>
           </a:xfrm>
         </p:spPr>
         <p:txBody>
+          <a:bodyPr anchor="b"/>
+          <a:lstStyle>
+            <a:lvl1pPr algn="l">
+              <a:defRPr sz="4000" b="1"/>
+            </a:lvl1pPr>
+          </a:lstStyle>
+          <a:p>
+            <a:r>
+              <a:rPr lang="en-US" smtClean="0"/>
+              <a:t>Click to edit Master title style</a:t>
+            </a:r>
+            <a:endParaRPr lang="en-US"/>
+          </a:p>
+        </p:txBody>
+      </p:sp>
+      <p:sp>
+        <p:nvSpPr>
+          <p:cNvPr id="3" name="Text Placeholder 2"/>
+          <p:cNvSpPr>
+            <a:spLocks noGrp="1"/>
+          </p:cNvSpPr>
+          <p:nvPr>
+            <p:ph type="body" idx="1"/>
+          </p:nvPr>
+        </p:nvSpPr>
+        <p:spPr>
+          <a:xfrm>
+            <a:off x="963084" y="3291840"/>
+            <a:ext cx="10363200" cy="1828800"/>
+          </a:xfrm>
+        </p:spPr>
+        <p:txBody>
           <a:bodyPr anchor="t"/>
           <a:lstStyle>
-            <a:lvl1pPr algn="l">
-              <a:defRPr sz="4000" b="1" cap="all"/>
-            </a:lvl1pPr>
-          </a:lstStyle>
-          <a:p>
-            <a:r>
-              <a:rPr lang="en-US" smtClean="0"/>
-              <a:t>Click to edit Master title style</a:t>
-            </a:r>
-            <a:endParaRPr lang="en-US"/>
-          </a:p>
-        </p:txBody>
-      </p:sp>
-      <p:sp>
-        <p:nvSpPr>
-          <p:cNvPr id="3" name="Text Placeholder 2"/>
-          <p:cNvSpPr>
-            <a:spLocks noGrp="1"/>
-          </p:cNvSpPr>
-          <p:nvPr>
-            <p:ph type="body" idx="1"/>
-          </p:nvPr>
-        </p:nvSpPr>
-        <p:spPr>
-          <a:xfrm>
-            <a:off x="722313" y="2906713"/>
-            <a:ext cx="7772400" cy="1500187"/>
-          </a:xfrm>
-        </p:spPr>
-        <p:txBody>
-          <a:bodyPr anchor="b"/>
-          <a:lstStyle>
-            <a:lvl1pPr marL="0" indent="0">
+            <a:lvl1pPr marL="0" indent="0" algn="l">
               <a:buNone/>
               <a:defRPr sz="2000">
                 <a:solidFill>
@@ -1033,7 +1033,7 @@
             </a:lvl9pPr>
           </a:lstStyle>
           <a:p>
-            <a:pPr lvl="0"/>
+            <a:pPr lvl="0" algn="l"/>
             <a:r>
               <a:rPr lang="en-US" smtClean="0"/>
               <a:t>Click to edit Master text styles</a:t>
@@ -1171,8 +1171,8 @@
         </p:nvSpPr>
         <p:spPr>
           <a:xfrm>
-            <a:off x="457200" y="1600200"/>
-            <a:ext cx="4038600" cy="4525963"/>
+            <a:off x="609600" y="1600200"/>
+            <a:ext cx="5384800" cy="4525963"/>
           </a:xfrm>
         </p:spPr>
         <p:txBody>
@@ -1256,8 +1256,8 @@
         </p:nvSpPr>
         <p:spPr>
           <a:xfrm>
-            <a:off x="4648200" y="1600200"/>
-            <a:ext cx="4038600" cy="4525963"/>
+            <a:off x="6197600" y="1600200"/>
+            <a:ext cx="5384800" cy="4525963"/>
           </a:xfrm>
         </p:spPr>
         <p:txBody>
@@ -1463,8 +1463,8 @@
         </p:nvSpPr>
         <p:spPr>
           <a:xfrm>
-            <a:off x="457200" y="1535113"/>
-            <a:ext cx="4040188" cy="639762"/>
+            <a:off x="609600" y="1535113"/>
+            <a:ext cx="5386917" cy="639762"/>
           </a:xfrm>
         </p:spPr>
         <p:txBody>
@@ -1528,8 +1528,8 @@
         </p:nvSpPr>
         <p:spPr>
           <a:xfrm>
-            <a:off x="457200" y="2174875"/>
-            <a:ext cx="4040188" cy="3951288"/>
+            <a:off x="609600" y="2174875"/>
+            <a:ext cx="5386917" cy="3951288"/>
           </a:xfrm>
         </p:spPr>
         <p:txBody>
@@ -1613,8 +1613,8 @@
         </p:nvSpPr>
         <p:spPr>
           <a:xfrm>
-            <a:off x="4645025" y="1535113"/>
-            <a:ext cx="4041775" cy="639762"/>
+            <a:off x="6193366" y="1535113"/>
+            <a:ext cx="5389033" cy="639762"/>
           </a:xfrm>
         </p:spPr>
         <p:txBody>
@@ -1678,8 +1678,8 @@
         </p:nvSpPr>
         <p:spPr>
           <a:xfrm>
-            <a:off x="4645025" y="2174875"/>
-            <a:ext cx="4041775" cy="3951288"/>
+            <a:off x="6193366" y="2174875"/>
+            <a:ext cx="5389033" cy="3951288"/>
           </a:xfrm>
         </p:spPr>
         <p:txBody>
@@ -2071,8 +2071,8 @@
         </p:nvSpPr>
         <p:spPr>
           <a:xfrm>
-            <a:off x="457200" y="273050"/>
-            <a:ext cx="3008313" cy="1162050"/>
+            <a:off x="609600" y="273050"/>
+            <a:ext cx="4011084" cy="1162050"/>
           </a:xfrm>
         </p:spPr>
         <p:txBody>
@@ -2103,8 +2103,8 @@
         </p:nvSpPr>
         <p:spPr>
           <a:xfrm>
-            <a:off x="3575050" y="273050"/>
-            <a:ext cx="5111750" cy="5853113"/>
+            <a:off x="4766733" y="273050"/>
+            <a:ext cx="6815666" cy="5853113"/>
           </a:xfrm>
         </p:spPr>
         <p:txBody>
@@ -2188,8 +2188,8 @@
         </p:nvSpPr>
         <p:spPr>
           <a:xfrm>
-            <a:off x="457200" y="1435100"/>
-            <a:ext cx="3008313" cy="4691063"/>
+            <a:off x="609600" y="1435100"/>
+            <a:ext cx="4011084" cy="4691063"/>
           </a:xfrm>
         </p:spPr>
         <p:txBody>
@@ -2348,8 +2348,8 @@
         </p:nvSpPr>
         <p:spPr>
           <a:xfrm>
-            <a:off x="1792288" y="4800600"/>
-            <a:ext cx="5486400" cy="566738"/>
+            <a:off x="2389717" y="4800600"/>
+            <a:ext cx="7315200" cy="566738"/>
           </a:xfrm>
         </p:spPr>
         <p:txBody>
@@ -2380,8 +2380,8 @@
         </p:nvSpPr>
         <p:spPr>
           <a:xfrm>
-            <a:off x="1792288" y="612775"/>
-            <a:ext cx="5486400" cy="4114800"/>
+            <a:off x="2389717" y="612775"/>
+            <a:ext cx="7315200" cy="4114800"/>
           </a:xfrm>
         </p:spPr>
         <p:txBody>
@@ -2441,8 +2441,8 @@
         </p:nvSpPr>
         <p:spPr>
           <a:xfrm>
-            <a:off x="1792288" y="5367338"/>
-            <a:ext cx="5486400" cy="804862"/>
+            <a:off x="2389717" y="5367338"/>
+            <a:ext cx="7315200" cy="804862"/>
           </a:xfrm>
         </p:spPr>
         <p:txBody>
@@ -2606,8 +2606,8 @@
         </p:nvSpPr>
         <p:spPr>
           <a:xfrm>
-            <a:off x="457200" y="274638"/>
-            <a:ext cx="8229600" cy="1143000"/>
+            <a:off x="609600" y="274638"/>
+            <a:ext cx="10972800" cy="1143000"/>
           </a:xfrm>
           <a:prstGeom prst="rect">
             <a:avLst/>
@@ -2639,8 +2639,8 @@
         </p:nvSpPr>
         <p:spPr>
           <a:xfrm>
-            <a:off x="457200" y="1600200"/>
-            <a:ext cx="8229600" cy="4525963"/>
+            <a:off x="609600" y="1600200"/>
+            <a:ext cx="10972800" cy="4525963"/>
           </a:xfrm>
           <a:prstGeom prst="rect">
             <a:avLst/>
@@ -2701,8 +2701,8 @@
         </p:nvSpPr>
         <p:spPr>
           <a:xfrm>
-            <a:off x="457200" y="6356350"/>
-            <a:ext cx="2133600" cy="365125"/>
+            <a:off x="609600" y="6356350"/>
+            <a:ext cx="2844800" cy="365125"/>
           </a:xfrm>
           <a:prstGeom prst="rect">
             <a:avLst/>
@@ -2742,8 +2742,8 @@
         </p:nvSpPr>
         <p:spPr>
           <a:xfrm>
-            <a:off x="3124200" y="6356350"/>
-            <a:ext cx="2895600" cy="365125"/>
+            <a:off x="4165600" y="6356350"/>
+            <a:ext cx="3860800" cy="365125"/>
           </a:xfrm>
           <a:prstGeom prst="rect">
             <a:avLst/>
@@ -2779,8 +2779,8 @@
         </p:nvSpPr>
         <p:spPr>
           <a:xfrm>
-            <a:off x="6553200" y="6356350"/>
-            <a:ext cx="2133600" cy="365125"/>
+            <a:off x="8737600" y="6356350"/>
+            <a:ext cx="2844800" cy="365125"/>
           </a:xfrm>
           <a:prstGeom prst="rect">
             <a:avLst/>
@@ -2808,30 +2808,6 @@
           </a:p>
         </p:txBody>
       </p:sp>
-      <p:pic>
-        <p:nvPicPr>
-          <p:cNvPr id="9901" name="ALS TDI Logo"/>
-          <p:cNvPicPr>
-            <a:picLocks noChangeAspect="1"/>
-          </p:cNvPicPr>
-          <p:nvPr/>
-        </p:nvPicPr>
-        <p:blipFill>
-          <a:blip r:embed="rId13"/>
-          <a:stretch>
-            <a:fillRect/>
-          </a:stretch>
-        </p:blipFill>
-        <p:spPr>
-          <a:xfrm>
-            <a:off x="8065008" y="6043049"/>
-            <a:ext cx="914400" cy="705223"/>
-          </a:xfrm>
-          <a:prstGeom prst="rect">
-            <a:avLst/>
-          </a:prstGeom>
-        </p:spPr>
-      </p:pic>
     </p:spTree>
     <p:extLst>
       <p:ext uri="{BB962C8B-B14F-4D97-AF65-F5344CB8AC3E}">
@@ -2855,12 +2831,12 @@
   </p:sldLayoutIdLst>
   <p:txStyles>
     <p:titleStyle>
-      <a:lvl1pPr algn="ctr" defTabSz="457200" rtl="0" eaLnBrk="1" latinLnBrk="0" hangingPunct="1">
+      <a:lvl1pPr algn="l" defTabSz="457200" rtl="0" eaLnBrk="1" latinLnBrk="0" hangingPunct="1">
         <a:spcBef>
           <a:spcPct val="0"/>
         </a:spcBef>
         <a:buNone/>
-        <a:defRPr sz="4400" kern="1200">
+        <a:defRPr sz="3200" kern="1200" b="1">
           <a:solidFill>
             <a:schemeClr val="tx1"/>
           </a:solidFill>
@@ -2877,7 +2853,7 @@
         </a:spcBef>
         <a:buFont typeface="Arial"/>
         <a:buChar char="•"/>
-        <a:defRPr sz="3200" kern="1200">
+        <a:defRPr sz="2000" kern="1200">
           <a:solidFill>
             <a:schemeClr val="tx1"/>
           </a:solidFill>
@@ -2892,7 +2868,7 @@
         </a:spcBef>
         <a:buFont typeface="Arial"/>
         <a:buChar char="–"/>
-        <a:defRPr sz="2800" kern="1200">
+        <a:defRPr sz="1800" kern="1200">
           <a:solidFill>
             <a:schemeClr val="tx1"/>
           </a:solidFill>
@@ -2907,7 +2883,7 @@
         </a:spcBef>
         <a:buFont typeface="Arial"/>
         <a:buChar char="•"/>
-        <a:defRPr sz="2400" kern="1200">
+        <a:defRPr sz="1600" kern="1200">
           <a:solidFill>
             <a:schemeClr val="tx1"/>
           </a:solidFill>
@@ -2922,7 +2898,7 @@
         </a:spcBef>
         <a:buFont typeface="Arial"/>
         <a:buChar char="–"/>
-        <a:defRPr sz="2000" kern="1200">
+        <a:defRPr sz="1400" kern="1200">
           <a:solidFill>
             <a:schemeClr val="tx1"/>
           </a:solidFill>
@@ -2937,7 +2913,7 @@
         </a:spcBef>
         <a:buFont typeface="Arial"/>
         <a:buChar char="»"/>
-        <a:defRPr sz="2000" kern="1200">
+        <a:defRPr sz="1400" kern="1200">
           <a:solidFill>
             <a:schemeClr val="tx1"/>
           </a:solidFill>
@@ -3123,7 +3099,7 @@
             <a:spLocks noGrp="1"/>
           </p:cNvSpPr>
           <p:nvPr>
-            <p:ph type="title"/>
+            <p:ph type="ctrTitle"/>
           </p:nvPr>
         </p:nvSpPr>
         <p:spPr/>
@@ -3139,19 +3115,22 @@
       </p:sp>
       <p:sp>
         <p:nvSpPr>
-          <p:cNvPr id="3" name="Content Placeholder 2"/>
-          <p:cNvSpPr>
-            <a:spLocks noGrp="1"/>
-          </p:cNvSpPr>
-          <p:nvPr>
-            <p:ph idx="1"/>
-          </p:nvPr>
-        </p:nvSpPr>
-        <p:spPr/>
-        <p:txBody>
-          <a:bodyPr/>
-          <a:lstStyle/>
-          <a:p>
+          <p:cNvPr id="3" name="Subtitle 2"/>
+          <p:cNvSpPr>
+            <a:spLocks noGrp="1"/>
+          </p:cNvSpPr>
+          <p:nvPr>
+            <p:ph type="subTitle" idx="1"/>
+          </p:nvPr>
+        </p:nvSpPr>
+        <p:spPr/>
+        <p:txBody>
+          <a:bodyPr/>
+          <a:lstStyle/>
+          <a:p>
+            <a:pPr marL="0" indent="0">
+              <a:buNone/>
+            </a:pPr>
             <a:r>
               <a:t>Participant Handout</a:t>
             </a:r>
@@ -3212,13 +3191,17 @@
           <a:bodyPr/>
           <a:lstStyle/>
           <a:p>
-            <a:r>
-              <a:t>- Understand treatment pathways</a:t>
-            </a:r>
-          </a:p>
-          <a:p>
-            <a:r>
-              <a:t>- Interpret ATLAS visualizations</a:t>
+            <a:pPr/>
+            <a:r>
+              <a:rPr sz="2400"/>
+              <a:t>Understand treatment pathways</a:t>
+            </a:r>
+          </a:p>
+          <a:p>
+            <a:pPr/>
+            <a:r>
+              <a:rPr sz="2400"/>
+              <a:t>Interpret ATLAS visualizations</a:t>
             </a:r>
           </a:p>
         </p:txBody>
@@ -3277,13 +3260,17 @@
           <a:bodyPr/>
           <a:lstStyle/>
           <a:p>
-            <a:r>
-              <a:t>- Pathways are descriptive</a:t>
-            </a:r>
-          </a:p>
-          <a:p>
-            <a:r>
-              <a:t>- Design choices matter</a:t>
+            <a:pPr/>
+            <a:r>
+              <a:rPr sz="2400"/>
+              <a:t>Pathways are descriptive</a:t>
+            </a:r>
+          </a:p>
+          <a:p>
+            <a:pPr/>
+            <a:r>
+              <a:rPr sz="2400"/>
+              <a:t>Design choices matter</a:t>
             </a:r>
           </a:p>
         </p:txBody>
@@ -3342,17 +3329,29 @@
           <a:bodyPr/>
           <a:lstStyle/>
           <a:p>
-            <a:r>
+            <a:pPr marL="0" indent="0">
+              <a:buNone/>
+            </a:pPr>
+            <a:r>
+              <a:rPr sz="2400"/>
               <a:t>1. Identify dominant first-line therapy</a:t>
             </a:r>
           </a:p>
           <a:p>
-            <a:r>
+            <a:pPr marL="0" indent="0">
+              <a:buNone/>
+            </a:pPr>
+            <a:r>
+              <a:rPr sz="2400"/>
               <a:t>2. Estimate insulin escalation</a:t>
             </a:r>
           </a:p>
           <a:p>
-            <a:r>
+            <a:pPr marL="0" indent="0">
+              <a:buNone/>
+            </a:pPr>
+            <a:r>
+              <a:rPr sz="2400"/>
               <a:t>3. Compare subgroups</a:t>
             </a:r>
           </a:p>
@@ -3399,26 +3398,32 @@
       </p:sp>
       <p:sp>
         <p:nvSpPr>
-          <p:cNvPr id="3" name="Content Placeholder 2"/>
-          <p:cNvSpPr>
-            <a:spLocks noGrp="1"/>
-          </p:cNvSpPr>
-          <p:nvPr>
-            <p:ph idx="1"/>
-          </p:nvPr>
-        </p:nvSpPr>
-        <p:spPr/>
-        <p:txBody>
-          <a:bodyPr/>
-          <a:lstStyle/>
-          <a:p>
-            <a:r>
-              <a:t>- Arrow width = proportion</a:t>
-            </a:r>
-          </a:p>
-          <a:p>
-            <a:r>
-              <a:t>- Grey ≠ no care</a:t>
+          <p:cNvPr id="3" name="Text Placeholder 2"/>
+          <p:cNvSpPr>
+            <a:spLocks noGrp="1"/>
+          </p:cNvSpPr>
+          <p:nvPr>
+            <p:ph type="body" idx="1"/>
+          </p:nvPr>
+        </p:nvSpPr>
+        <p:spPr/>
+        <p:txBody>
+          <a:bodyPr/>
+          <a:lstStyle/>
+          <a:p>
+            <a:pPr marL="0" indent="0">
+              <a:buNone/>
+            </a:pPr>
+            <a:r>
+              <a:t>Arc size = share of the cohort</a:t>
+            </a:r>
+          </a:p>
+          <a:p>
+            <a:pPr marL="0" indent="0">
+              <a:buNone/>
+            </a:pPr>
+            <a:r>
+              <a:t>Grey = end of the pathway, not the end of care</a:t>
             </a:r>
           </a:p>
         </p:txBody>
@@ -3434,7 +3439,7 @@
 <file path=ppt/theme/theme1.xml><?xml version="1.0" encoding="utf-8"?>
 <a:theme xmlns:a="http://schemas.openxmlformats.org/drawingml/2006/main" name="Office Theme">
   <a:themeElements>
-    <a:clrScheme name="ALS TDI">
+    <a:clrScheme name="Office">
       <a:dk1>
         <a:sysClr val="windowText" lastClr="000000"/>
       </a:dk1>
@@ -3442,39 +3447,39 @@
         <a:sysClr val="window" lastClr="FFFFFF"/>
       </a:lt1>
       <a:dk2>
-        <a:srgbClr val="6D2F77"/>
+        <a:srgbClr val="262626"/>
       </a:dk2>
       <a:lt2>
-        <a:srgbClr val="F2EAF4"/>
+        <a:srgbClr val="F2F2F2"/>
       </a:lt2>
       <a:accent1>
-        <a:srgbClr val="904199"/>
+        <a:srgbClr val="404040"/>
       </a:accent1>
       <a:accent2>
-        <a:srgbClr val="B872C0"/>
+        <a:srgbClr val="7F7F7F"/>
       </a:accent2>
       <a:accent3>
-        <a:srgbClr val="6D2F77"/>
+        <a:srgbClr val="A6A6A6"/>
       </a:accent3>
       <a:accent4>
-        <a:srgbClr val="4A4A4A"/>
+        <a:srgbClr val="595959"/>
       </a:accent4>
       <a:accent5>
-        <a:srgbClr val="D9C2DE"/>
+        <a:srgbClr val="BFBFBF"/>
       </a:accent5>
       <a:accent6>
-        <a:srgbClr val="7A3580"/>
+        <a:srgbClr val="262626"/>
       </a:accent6>
       <a:hlink>
-        <a:srgbClr val="904199"/>
+        <a:srgbClr val="000000"/>
       </a:hlink>
       <a:folHlink>
-        <a:srgbClr val="6D2F77"/>
+        <a:srgbClr val="404040"/>
       </a:folHlink>
     </a:clrScheme>
     <a:fontScheme name="Office">
       <a:majorFont>
-        <a:latin typeface="EB Garamond"/>
+        <a:latin typeface="Calibri"/>
         <a:ea typeface=""/>
         <a:cs typeface=""/>
         <a:font script="Jpan" typeface="ＭＳ Ｐゴシック"/>

--- a/docs/free-rwe-resources/train-the-trainer/training/day-05-treatment-pathways/kit/Participant-Handout.pptx
+++ b/docs/free-rwe-resources/train-the-trainer/training/day-05-treatment-pathways/kit/Participant-Handout.pptx
@@ -3108,7 +3108,7 @@
           <a:lstStyle/>
           <a:p>
             <a:r>
-              <a:t>Treatment Pathway Analysis – Diabetes</a:t>
+              <a:t>Treatment Pathway Analysis – ALS Medications</a:t>
             </a:r>
           </a:p>
         </p:txBody>
@@ -3343,7 +3343,7 @@
             </a:pPr>
             <a:r>
               <a:rPr sz="2400"/>
-              <a:t>2. Estimate insulin escalation</a:t>
+              <a:t>2. Estimate the share with edaravone after riluzole</a:t>
             </a:r>
           </a:p>
           <a:p>
